--- a/assets/templates/MS3L_presentation_template_gradient.pptx
+++ b/assets/templates/MS3L_presentation_template_gradient.pptx
@@ -3168,9 +3168,52 @@
           </a:prstGeom>
         </p:spPr>
       </p:pic>
+      <p:sp>
+        <p:nvSpPr>
+          <p:cNvPr id="4" name="Rectangle 3"/>
+          <p:cNvSpPr/>
+          <p:nvPr/>
+        </p:nvSpPr>
+        <p:spPr>
+          <a:xfrm>
+            <a:off x="8385048" y="1856231"/>
+            <a:ext cx="14630" cy="1097280"/>
+          </a:xfrm>
+          <a:prstGeom prst="rect">
+            <a:avLst/>
+          </a:prstGeom>
+          <a:solidFill>
+            <a:srgbClr val="B6E5E3"/>
+          </a:solidFill>
+          <a:ln>
+            <a:noFill/>
+          </a:ln>
+        </p:spPr>
+        <p:style>
+          <a:lnRef idx="1">
+            <a:schemeClr val="accent1"/>
+          </a:lnRef>
+          <a:fillRef idx="3">
+            <a:schemeClr val="accent1"/>
+          </a:fillRef>
+          <a:effectRef idx="2">
+            <a:schemeClr val="accent1"/>
+          </a:effectRef>
+          <a:fontRef idx="minor">
+            <a:schemeClr val="lt1"/>
+          </a:fontRef>
+        </p:style>
+        <p:txBody>
+          <a:bodyPr rtlCol="0" anchor="ctr"/>
+          <a:lstStyle/>
+          <a:p>
+            <a:pPr algn="ctr"/>
+          </a:p>
+        </p:txBody>
+      </p:sp>
       <p:pic>
         <p:nvPicPr>
-          <p:cNvPr id="4" name="Picture 3" descr="krict-logo-white.png"/>
+          <p:cNvPr id="5" name="Picture 4" descr="krict-logo-white.png"/>
           <p:cNvPicPr>
             <a:picLocks noChangeAspect="1"/>
           </p:cNvPicPr>
@@ -3184,8 +3227,8 @@
         </p:blipFill>
         <p:spPr>
           <a:xfrm>
-            <a:off x="9402775" y="658368"/>
-            <a:ext cx="2011680" cy="635356"/>
+            <a:off x="8823960" y="2066544"/>
+            <a:ext cx="2142446" cy="676656"/>
           </a:xfrm>
           <a:prstGeom prst="rect">
             <a:avLst/>
@@ -3194,7 +3237,7 @@
       </p:pic>
       <p:sp>
         <p:nvSpPr>
-          <p:cNvPr id="5" name="TextBox 4"/>
+          <p:cNvPr id="6" name="TextBox 5"/>
           <p:cNvSpPr txBox="1"/>
           <p:nvPr/>
         </p:nvSpPr>
@@ -3233,7 +3276,7 @@
       </p:sp>
       <p:sp>
         <p:nvSpPr>
-          <p:cNvPr id="6" name="TextBox 5"/>
+          <p:cNvPr id="7" name="TextBox 6"/>
           <p:cNvSpPr txBox="1"/>
           <p:nvPr/>
         </p:nvSpPr>
@@ -3272,7 +3315,7 @@
       </p:sp>
       <p:sp>
         <p:nvSpPr>
-          <p:cNvPr id="7" name="TextBox 6"/>
+          <p:cNvPr id="8" name="TextBox 7"/>
           <p:cNvSpPr txBox="1"/>
           <p:nvPr/>
         </p:nvSpPr>
@@ -3311,14 +3354,14 @@
       </p:sp>
       <p:sp>
         <p:nvSpPr>
-          <p:cNvPr id="8" name="TextBox 7"/>
+          <p:cNvPr id="9" name="TextBox 8"/>
           <p:cNvSpPr txBox="1"/>
           <p:nvPr/>
         </p:nvSpPr>
         <p:spPr>
           <a:xfrm>
             <a:off x="777240" y="5577840"/>
-            <a:ext cx="9692640" cy="457200"/>
+            <a:ext cx="10424160" cy="457200"/>
           </a:xfrm>
           <a:prstGeom prst="rect">
             <a:avLst/>
@@ -3343,14 +3386,14 @@
                 </a:solidFill>
                 <a:latin typeface="Arial"/>
               </a:rPr>
-              <a:t>Membrane-based Sustainable Separation Solutions Laboratory, KRICT</a:t>
-            </a:r>
-          </a:p>
-        </p:txBody>
-      </p:sp>
-      <p:sp>
-        <p:nvSpPr>
-          <p:cNvPr id="9" name="TextBox 8"/>
+              <a:t>Membrane-based Sustainable Separation Solutions Laboratory  ·  Korea Research Institute of Chemical Technology</a:t>
+            </a:r>
+          </a:p>
+        </p:txBody>
+      </p:sp>
+      <p:sp>
+        <p:nvSpPr>
+          <p:cNvPr id="10" name="TextBox 9"/>
           <p:cNvSpPr txBox="1"/>
           <p:nvPr/>
         </p:nvSpPr>
@@ -3630,7 +3673,7 @@
       </p:sp>
       <p:pic>
         <p:nvPicPr>
-          <p:cNvPr id="7" name="Picture 6" descr="ms3l-avatar-circle.png"/>
+          <p:cNvPr id="7" name="Picture 6" descr="krict-logo.png"/>
           <p:cNvPicPr>
             <a:picLocks noChangeAspect="1"/>
           </p:cNvPicPr>
@@ -3644,7 +3687,74 @@
         </p:blipFill>
         <p:spPr>
           <a:xfrm>
-            <a:off x="10500055" y="5257800"/>
+            <a:off x="10430088" y="5532120"/>
+            <a:ext cx="984367" cy="310896"/>
+          </a:xfrm>
+          <a:prstGeom prst="rect">
+            <a:avLst/>
+          </a:prstGeom>
+        </p:spPr>
+      </p:pic>
+      <p:sp>
+        <p:nvSpPr>
+          <p:cNvPr id="8" name="Rectangle 7"/>
+          <p:cNvSpPr/>
+          <p:nvPr/>
+        </p:nvSpPr>
+        <p:spPr>
+          <a:xfrm>
+            <a:off x="10265496" y="5280660"/>
+            <a:ext cx="12801" cy="813816"/>
+          </a:xfrm>
+          <a:prstGeom prst="rect">
+            <a:avLst/>
+          </a:prstGeom>
+          <a:solidFill>
+            <a:srgbClr val="D6E2EE"/>
+          </a:solidFill>
+          <a:ln>
+            <a:noFill/>
+          </a:ln>
+        </p:spPr>
+        <p:style>
+          <a:lnRef idx="1">
+            <a:schemeClr val="accent1"/>
+          </a:lnRef>
+          <a:fillRef idx="3">
+            <a:schemeClr val="accent1"/>
+          </a:fillRef>
+          <a:effectRef idx="2">
+            <a:schemeClr val="accent1"/>
+          </a:effectRef>
+          <a:fontRef idx="minor">
+            <a:schemeClr val="lt1"/>
+          </a:fontRef>
+        </p:style>
+        <p:txBody>
+          <a:bodyPr rtlCol="0" anchor="ctr"/>
+          <a:lstStyle/>
+          <a:p>
+            <a:pPr algn="ctr"/>
+          </a:p>
+        </p:txBody>
+      </p:sp>
+      <p:pic>
+        <p:nvPicPr>
+          <p:cNvPr id="9" name="Picture 8" descr="ms3l-avatar-circle.png"/>
+          <p:cNvPicPr>
+            <a:picLocks noChangeAspect="1"/>
+          </p:cNvPicPr>
+          <p:nvPr/>
+        </p:nvPicPr>
+        <p:blipFill>
+          <a:blip r:embed="rId3"/>
+          <a:stretch>
+            <a:fillRect/>
+          </a:stretch>
+        </p:blipFill>
+        <p:spPr>
+          <a:xfrm>
+            <a:off x="9232224" y="5253228"/>
             <a:ext cx="868680" cy="868680"/>
           </a:xfrm>
           <a:prstGeom prst="rect">
@@ -3856,7 +3966,7 @@
       </p:sp>
       <p:pic>
         <p:nvPicPr>
-          <p:cNvPr id="6" name="Picture 5" descr="ms3l-avatar-circle.png"/>
+          <p:cNvPr id="6" name="Picture 5" descr="krict-logo.png"/>
           <p:cNvPicPr>
             <a:picLocks noChangeAspect="1"/>
           </p:cNvPicPr>
@@ -3870,8 +3980,8 @@
         </p:blipFill>
         <p:spPr>
           <a:xfrm>
-            <a:off x="10564063" y="475488"/>
-            <a:ext cx="384048" cy="384048"/>
+            <a:off x="10661704" y="548640"/>
+            <a:ext cx="752751" cy="237744"/>
           </a:xfrm>
           <a:prstGeom prst="rect">
             <a:avLst/>
@@ -3886,8 +3996,8 @@
         </p:nvSpPr>
         <p:spPr>
           <a:xfrm>
-            <a:off x="11057839" y="512064"/>
-            <a:ext cx="9144" cy="310896"/>
+            <a:off x="10497112" y="502920"/>
+            <a:ext cx="12801" cy="329184"/>
           </a:xfrm>
           <a:prstGeom prst="rect">
             <a:avLst/>
@@ -3923,7 +4033,7 @@
       </p:sp>
       <p:pic>
         <p:nvPicPr>
-          <p:cNvPr id="8" name="Picture 7" descr="krict-logo.png"/>
+          <p:cNvPr id="8" name="Picture 7" descr="ms3l-avatar-circle.png"/>
           <p:cNvPicPr>
             <a:picLocks noChangeAspect="1"/>
           </p:cNvPicPr>
@@ -3937,8 +4047,8 @@
         </p:blipFill>
         <p:spPr>
           <a:xfrm>
-            <a:off x="11140135" y="548640"/>
-            <a:ext cx="752751" cy="237744"/>
+            <a:off x="9948472" y="475488"/>
+            <a:ext cx="384048" cy="384048"/>
           </a:xfrm>
           <a:prstGeom prst="rect">
             <a:avLst/>
@@ -3953,7 +4063,7 @@
         </p:nvSpPr>
         <p:spPr>
           <a:xfrm>
-            <a:off x="10957255" y="6382512"/>
+            <a:off x="10774375" y="6382512"/>
             <a:ext cx="640080" cy="274320"/>
           </a:xfrm>
           <a:prstGeom prst="rect">
@@ -4590,7 +4700,7 @@
       </p:sp>
       <p:pic>
         <p:nvPicPr>
-          <p:cNvPr id="6" name="Picture 5" descr="ms3l-avatar-circle.png"/>
+          <p:cNvPr id="6" name="Picture 5" descr="krict-logo.png"/>
           <p:cNvPicPr>
             <a:picLocks noChangeAspect="1"/>
           </p:cNvPicPr>
@@ -4604,8 +4714,8 @@
         </p:blipFill>
         <p:spPr>
           <a:xfrm>
-            <a:off x="10564063" y="475488"/>
-            <a:ext cx="384048" cy="384048"/>
+            <a:off x="10661704" y="548640"/>
+            <a:ext cx="752751" cy="237744"/>
           </a:xfrm>
           <a:prstGeom prst="rect">
             <a:avLst/>
@@ -4620,8 +4730,8 @@
         </p:nvSpPr>
         <p:spPr>
           <a:xfrm>
-            <a:off x="11057839" y="512064"/>
-            <a:ext cx="9144" cy="310896"/>
+            <a:off x="10497112" y="502920"/>
+            <a:ext cx="12801" cy="329184"/>
           </a:xfrm>
           <a:prstGeom prst="rect">
             <a:avLst/>
@@ -4657,7 +4767,7 @@
       </p:sp>
       <p:pic>
         <p:nvPicPr>
-          <p:cNvPr id="8" name="Picture 7" descr="krict-logo.png"/>
+          <p:cNvPr id="8" name="Picture 7" descr="ms3l-avatar-circle.png"/>
           <p:cNvPicPr>
             <a:picLocks noChangeAspect="1"/>
           </p:cNvPicPr>
@@ -4671,8 +4781,8 @@
         </p:blipFill>
         <p:spPr>
           <a:xfrm>
-            <a:off x="11140135" y="548640"/>
-            <a:ext cx="752751" cy="237744"/>
+            <a:off x="9948472" y="475488"/>
+            <a:ext cx="384048" cy="384048"/>
           </a:xfrm>
           <a:prstGeom prst="rect">
             <a:avLst/>
@@ -4687,7 +4797,7 @@
         </p:nvSpPr>
         <p:spPr>
           <a:xfrm>
-            <a:off x="10957255" y="6382512"/>
+            <a:off x="10774375" y="6382512"/>
             <a:ext cx="640080" cy="274320"/>
           </a:xfrm>
           <a:prstGeom prst="rect">
@@ -5270,7 +5380,7 @@
       </p:sp>
       <p:pic>
         <p:nvPicPr>
-          <p:cNvPr id="6" name="Picture 5" descr="ms3l-avatar-circle.png"/>
+          <p:cNvPr id="6" name="Picture 5" descr="krict-logo.png"/>
           <p:cNvPicPr>
             <a:picLocks noChangeAspect="1"/>
           </p:cNvPicPr>
@@ -5284,8 +5394,8 @@
         </p:blipFill>
         <p:spPr>
           <a:xfrm>
-            <a:off x="10564063" y="475488"/>
-            <a:ext cx="384048" cy="384048"/>
+            <a:off x="10661704" y="548640"/>
+            <a:ext cx="752751" cy="237744"/>
           </a:xfrm>
           <a:prstGeom prst="rect">
             <a:avLst/>
@@ -5300,8 +5410,8 @@
         </p:nvSpPr>
         <p:spPr>
           <a:xfrm>
-            <a:off x="11057839" y="512064"/>
-            <a:ext cx="9144" cy="310896"/>
+            <a:off x="10497112" y="502920"/>
+            <a:ext cx="12801" cy="329184"/>
           </a:xfrm>
           <a:prstGeom prst="rect">
             <a:avLst/>
@@ -5337,7 +5447,7 @@
       </p:sp>
       <p:pic>
         <p:nvPicPr>
-          <p:cNvPr id="8" name="Picture 7" descr="krict-logo.png"/>
+          <p:cNvPr id="8" name="Picture 7" descr="ms3l-avatar-circle.png"/>
           <p:cNvPicPr>
             <a:picLocks noChangeAspect="1"/>
           </p:cNvPicPr>
@@ -5351,8 +5461,8 @@
         </p:blipFill>
         <p:spPr>
           <a:xfrm>
-            <a:off x="11140135" y="548640"/>
-            <a:ext cx="752751" cy="237744"/>
+            <a:off x="9948472" y="475488"/>
+            <a:ext cx="384048" cy="384048"/>
           </a:xfrm>
           <a:prstGeom prst="rect">
             <a:avLst/>
@@ -5367,7 +5477,7 @@
         </p:nvSpPr>
         <p:spPr>
           <a:xfrm>
-            <a:off x="10957255" y="6382512"/>
+            <a:off x="10774375" y="6382512"/>
             <a:ext cx="640080" cy="274320"/>
           </a:xfrm>
           <a:prstGeom prst="rect">
@@ -5727,6 +5837,112 @@
                 <a:latin typeface="Arial"/>
               </a:rPr>
               <a:t>https://ms3l.org</a:t>
+            </a:r>
+          </a:p>
+        </p:txBody>
+      </p:sp>
+      <p:sp>
+        <p:nvSpPr>
+          <p:cNvPr id="7" name="Rectangle 6"/>
+          <p:cNvSpPr/>
+          <p:nvPr/>
+        </p:nvSpPr>
+        <p:spPr>
+          <a:xfrm>
+            <a:off x="5592927" y="5321808"/>
+            <a:ext cx="1005840" cy="12801"/>
+          </a:xfrm>
+          <a:prstGeom prst="rect">
+            <a:avLst/>
+          </a:prstGeom>
+          <a:solidFill>
+            <a:srgbClr val="B6E5E3"/>
+          </a:solidFill>
+          <a:ln>
+            <a:noFill/>
+          </a:ln>
+        </p:spPr>
+        <p:style>
+          <a:lnRef idx="1">
+            <a:schemeClr val="accent1"/>
+          </a:lnRef>
+          <a:fillRef idx="3">
+            <a:schemeClr val="accent1"/>
+          </a:fillRef>
+          <a:effectRef idx="2">
+            <a:schemeClr val="accent1"/>
+          </a:effectRef>
+          <a:fontRef idx="minor">
+            <a:schemeClr val="lt1"/>
+          </a:fontRef>
+        </p:style>
+        <p:txBody>
+          <a:bodyPr rtlCol="0" anchor="ctr"/>
+          <a:lstStyle/>
+          <a:p>
+            <a:pPr algn="ctr"/>
+          </a:p>
+        </p:txBody>
+      </p:sp>
+      <p:pic>
+        <p:nvPicPr>
+          <p:cNvPr id="8" name="Picture 7" descr="krict-logo-white.png"/>
+          <p:cNvPicPr>
+            <a:picLocks noChangeAspect="1"/>
+          </p:cNvPicPr>
+          <p:nvPr/>
+        </p:nvPicPr>
+        <p:blipFill>
+          <a:blip r:embed="rId3"/>
+          <a:stretch>
+            <a:fillRect/>
+          </a:stretch>
+        </p:blipFill>
+        <p:spPr>
+          <a:xfrm>
+            <a:off x="5429952" y="5559552"/>
+            <a:ext cx="1331791" cy="420624"/>
+          </a:xfrm>
+          <a:prstGeom prst="rect">
+            <a:avLst/>
+          </a:prstGeom>
+        </p:spPr>
+      </p:pic>
+      <p:sp>
+        <p:nvSpPr>
+          <p:cNvPr id="9" name="TextBox 8"/>
+          <p:cNvSpPr txBox="1"/>
+          <p:nvPr/>
+        </p:nvSpPr>
+        <p:spPr>
+          <a:xfrm>
+            <a:off x="777240" y="6144768"/>
+            <a:ext cx="10637215" cy="320040"/>
+          </a:xfrm>
+          <a:prstGeom prst="rect">
+            <a:avLst/>
+          </a:prstGeom>
+          <a:noFill/>
+        </p:spPr>
+        <p:txBody>
+          <a:bodyPr wrap="square" lIns="0" rIns="0" tIns="0" bIns="0">
+            <a:spAutoFit/>
+          </a:bodyPr>
+          <a:lstStyle/>
+          <a:p>
+            <a:pPr algn="ctr">
+              <a:lnSpc>
+                <a:spcPct val="100000"/>
+              </a:lnSpc>
+            </a:pPr>
+            <a:r>
+              <a:rPr sz="1100" b="0">
+                <a:solidFill>
+                  <a:srgbClr val="B6E5E3"/>
+                </a:solidFill>
+                <a:latin typeface="Arial"/>
+              </a:rPr>
+              <a:t>Korea Research Institute of Chemical Technology</a:t>
             </a:r>
           </a:p>
         </p:txBody>
